--- a/如此認識我.pptx
+++ b/如此認識我.pptx
@@ -310,7 +310,7 @@
           <a:p>
             <a:fld id="{DB96623A-A244-4575-9D50-703C9D557BCC}" type="datetimeFigureOut">
               <a:rPr lang="zh-TW" altLang="en-US" smtClean="0"/>
-              <a:t>2023/12/31</a:t>
+              <a:t>2026/3/14</a:t>
             </a:fld>
             <a:endParaRPr lang="zh-TW" altLang="en-US"/>
           </a:p>
@@ -473,7 +473,7 @@
           <a:p>
             <a:fld id="{DB96623A-A244-4575-9D50-703C9D557BCC}" type="datetimeFigureOut">
               <a:rPr lang="zh-TW" altLang="en-US" smtClean="0"/>
-              <a:t>2023/12/31</a:t>
+              <a:t>2026/3/14</a:t>
             </a:fld>
             <a:endParaRPr lang="zh-TW" altLang="en-US"/>
           </a:p>
@@ -646,7 +646,7 @@
           <a:p>
             <a:fld id="{DB96623A-A244-4575-9D50-703C9D557BCC}" type="datetimeFigureOut">
               <a:rPr lang="zh-TW" altLang="en-US" smtClean="0"/>
-              <a:t>2023/12/31</a:t>
+              <a:t>2026/3/14</a:t>
             </a:fld>
             <a:endParaRPr lang="zh-TW" altLang="en-US"/>
           </a:p>
@@ -809,7 +809,7 @@
           <a:p>
             <a:fld id="{DB96623A-A244-4575-9D50-703C9D557BCC}" type="datetimeFigureOut">
               <a:rPr lang="zh-TW" altLang="en-US" smtClean="0"/>
-              <a:t>2023/12/31</a:t>
+              <a:t>2026/3/14</a:t>
             </a:fld>
             <a:endParaRPr lang="zh-TW" altLang="en-US"/>
           </a:p>
@@ -1049,7 +1049,7 @@
           <a:p>
             <a:fld id="{DB96623A-A244-4575-9D50-703C9D557BCC}" type="datetimeFigureOut">
               <a:rPr lang="zh-TW" altLang="en-US" smtClean="0"/>
-              <a:t>2023/12/31</a:t>
+              <a:t>2026/3/14</a:t>
             </a:fld>
             <a:endParaRPr lang="zh-TW" altLang="en-US"/>
           </a:p>
@@ -1329,7 +1329,7 @@
           <a:p>
             <a:fld id="{DB96623A-A244-4575-9D50-703C9D557BCC}" type="datetimeFigureOut">
               <a:rPr lang="zh-TW" altLang="en-US" smtClean="0"/>
-              <a:t>2023/12/31</a:t>
+              <a:t>2026/3/14</a:t>
             </a:fld>
             <a:endParaRPr lang="zh-TW" altLang="en-US"/>
           </a:p>
@@ -1743,7 +1743,7 @@
           <a:p>
             <a:fld id="{DB96623A-A244-4575-9D50-703C9D557BCC}" type="datetimeFigureOut">
               <a:rPr lang="zh-TW" altLang="en-US" smtClean="0"/>
-              <a:t>2023/12/31</a:t>
+              <a:t>2026/3/14</a:t>
             </a:fld>
             <a:endParaRPr lang="zh-TW" altLang="en-US"/>
           </a:p>
@@ -1855,7 +1855,7 @@
           <a:p>
             <a:fld id="{DB96623A-A244-4575-9D50-703C9D557BCC}" type="datetimeFigureOut">
               <a:rPr lang="zh-TW" altLang="en-US" smtClean="0"/>
-              <a:t>2023/12/31</a:t>
+              <a:t>2026/3/14</a:t>
             </a:fld>
             <a:endParaRPr lang="zh-TW" altLang="en-US"/>
           </a:p>
@@ -1945,7 +1945,7 @@
           <a:p>
             <a:fld id="{DB96623A-A244-4575-9D50-703C9D557BCC}" type="datetimeFigureOut">
               <a:rPr lang="zh-TW" altLang="en-US" smtClean="0"/>
-              <a:t>2023/12/31</a:t>
+              <a:t>2026/3/14</a:t>
             </a:fld>
             <a:endParaRPr lang="zh-TW" altLang="en-US"/>
           </a:p>
@@ -2215,7 +2215,7 @@
           <a:p>
             <a:fld id="{DB96623A-A244-4575-9D50-703C9D557BCC}" type="datetimeFigureOut">
               <a:rPr lang="zh-TW" altLang="en-US" smtClean="0"/>
-              <a:t>2023/12/31</a:t>
+              <a:t>2026/3/14</a:t>
             </a:fld>
             <a:endParaRPr lang="zh-TW" altLang="en-US"/>
           </a:p>
@@ -2465,7 +2465,7 @@
           <a:p>
             <a:fld id="{DB96623A-A244-4575-9D50-703C9D557BCC}" type="datetimeFigureOut">
               <a:rPr lang="zh-TW" altLang="en-US" smtClean="0"/>
-              <a:t>2023/12/31</a:t>
+              <a:t>2026/3/14</a:t>
             </a:fld>
             <a:endParaRPr lang="zh-TW" altLang="en-US"/>
           </a:p>
@@ -2676,7 +2676,7 @@
           <a:p>
             <a:fld id="{DB96623A-A244-4575-9D50-703C9D557BCC}" type="datetimeFigureOut">
               <a:rPr lang="zh-TW" altLang="en-US" smtClean="0"/>
-              <a:t>2023/12/31</a:t>
+              <a:t>2026/3/14</a:t>
             </a:fld>
             <a:endParaRPr lang="zh-TW" altLang="en-US"/>
           </a:p>
@@ -3200,6 +3200,131 @@
           </a:p>
         </p:txBody>
       </p:sp>
+      <p:sp>
+        <p:nvSpPr>
+          <p:cNvPr id="2" name="TextBox 1">
+            <a:extLst>
+              <a:ext uri="{FF2B5EF4-FFF2-40B4-BE49-F238E27FC236}">
+                <a16:creationId xmlns:a16="http://schemas.microsoft.com/office/drawing/2014/main" id="{7B63A5C4-33CA-C05F-4727-B577068C94A8}"/>
+              </a:ext>
+            </a:extLst>
+          </p:cNvPr>
+          <p:cNvSpPr txBox="1"/>
+          <p:nvPr/>
+        </p:nvSpPr>
+        <p:spPr>
+          <a:xfrm>
+            <a:off x="0" y="5013176"/>
+            <a:ext cx="12192000" cy="667816"/>
+          </a:xfrm>
+          <a:prstGeom prst="rect">
+            <a:avLst/>
+          </a:prstGeom>
+        </p:spPr>
+        <p:txBody>
+          <a:bodyPr vert="horz" lIns="91440" tIns="45720" rIns="91440" bIns="45720" rtlCol="0" anchor="ctr">
+            <a:normAutofit/>
+          </a:bodyPr>
+          <a:lstStyle>
+            <a:defPPr>
+              <a:defRPr lang="zh-TW"/>
+            </a:defPPr>
+            <a:lvl1pPr marL="342900" indent="-342900" algn="ctr">
+              <a:spcBef>
+                <a:spcPct val="20000"/>
+              </a:spcBef>
+              <a:buFont typeface="Arial" panose="02080604020202020204" pitchFamily="34" charset="0"/>
+              <a:buNone/>
+              <a:defRPr sz="6400" b="1">
+                <a:solidFill>
+                  <a:srgbClr val="660033"/>
+                </a:solidFill>
+                <a:latin typeface="微軟正黑體" pitchFamily="34" charset="-120"/>
+                <a:ea typeface="微軟正黑體" pitchFamily="34" charset="-120"/>
+              </a:defRPr>
+            </a:lvl1pPr>
+            <a:lvl2pPr marL="742950" indent="-285750">
+              <a:spcBef>
+                <a:spcPct val="20000"/>
+              </a:spcBef>
+              <a:buFont typeface="Arial" panose="02080604020202020204" pitchFamily="34" charset="0"/>
+              <a:buChar char="–"/>
+              <a:defRPr sz="2800"/>
+            </a:lvl2pPr>
+            <a:lvl3pPr marL="1143000" indent="-228600">
+              <a:spcBef>
+                <a:spcPct val="20000"/>
+              </a:spcBef>
+              <a:buFont typeface="Arial" panose="02080604020202020204" pitchFamily="34" charset="0"/>
+              <a:buChar char="•"/>
+              <a:defRPr sz="2400"/>
+            </a:lvl3pPr>
+            <a:lvl4pPr marL="1600200" indent="-228600">
+              <a:spcBef>
+                <a:spcPct val="20000"/>
+              </a:spcBef>
+              <a:buFont typeface="Arial" panose="02080604020202020204" pitchFamily="34" charset="0"/>
+              <a:buChar char="–"/>
+              <a:defRPr sz="2000"/>
+            </a:lvl4pPr>
+            <a:lvl5pPr marL="2057400" indent="-228600">
+              <a:spcBef>
+                <a:spcPct val="20000"/>
+              </a:spcBef>
+              <a:buFont typeface="Arial" panose="02080604020202020204" pitchFamily="34" charset="0"/>
+              <a:buChar char="»"/>
+              <a:defRPr sz="2000"/>
+            </a:lvl5pPr>
+            <a:lvl6pPr marL="2514600" indent="-228600">
+              <a:spcBef>
+                <a:spcPct val="20000"/>
+              </a:spcBef>
+              <a:buFont typeface="Arial" panose="02080604020202020204" pitchFamily="34" charset="0"/>
+              <a:buChar char="•"/>
+              <a:defRPr sz="2000"/>
+            </a:lvl6pPr>
+            <a:lvl7pPr marL="2971800" indent="-228600">
+              <a:spcBef>
+                <a:spcPct val="20000"/>
+              </a:spcBef>
+              <a:buFont typeface="Arial" panose="02080604020202020204" pitchFamily="34" charset="0"/>
+              <a:buChar char="•"/>
+              <a:defRPr sz="2000"/>
+            </a:lvl7pPr>
+            <a:lvl8pPr marL="3429000" indent="-228600">
+              <a:spcBef>
+                <a:spcPct val="20000"/>
+              </a:spcBef>
+              <a:buFont typeface="Arial" panose="02080604020202020204" pitchFamily="34" charset="0"/>
+              <a:buChar char="•"/>
+              <a:defRPr sz="2000"/>
+            </a:lvl8pPr>
+            <a:lvl9pPr marL="3886200" indent="-228600">
+              <a:spcBef>
+                <a:spcPct val="20000"/>
+              </a:spcBef>
+              <a:buFont typeface="Arial" panose="02080604020202020204" pitchFamily="34" charset="0"/>
+              <a:buChar char="•"/>
+              <a:defRPr sz="2000"/>
+            </a:lvl9pPr>
+          </a:lstStyle>
+          <a:p>
+            <a:r>
+              <a:rPr lang="en-US" sz="3600" dirty="0"/>
+              <a:t>( </a:t>
+            </a:r>
+            <a:r>
+              <a:rPr lang="zh-CN" altLang="en-US" sz="3600" dirty="0"/>
+              <a:t>正歌</a:t>
+            </a:r>
+            <a:r>
+              <a:rPr lang="en-US" sz="3600" dirty="0"/>
+              <a:t> )</a:t>
+            </a:r>
+            <a:endParaRPr lang="vi-VN" sz="3600" dirty="0"/>
+          </a:p>
+        </p:txBody>
+      </p:sp>
     </p:spTree>
   </p:cSld>
   <p:clrMapOvr>
@@ -3322,6 +3447,131 @@
               </a:rPr>
               <a:t>也細察清楚</a:t>
             </a:r>
+          </a:p>
+        </p:txBody>
+      </p:sp>
+      <p:sp>
+        <p:nvSpPr>
+          <p:cNvPr id="2" name="TextBox 1">
+            <a:extLst>
+              <a:ext uri="{FF2B5EF4-FFF2-40B4-BE49-F238E27FC236}">
+                <a16:creationId xmlns:a16="http://schemas.microsoft.com/office/drawing/2014/main" id="{188FF25A-8B94-1642-26EF-0620A9C41BED}"/>
+              </a:ext>
+            </a:extLst>
+          </p:cNvPr>
+          <p:cNvSpPr txBox="1"/>
+          <p:nvPr/>
+        </p:nvSpPr>
+        <p:spPr>
+          <a:xfrm>
+            <a:off x="0" y="5013176"/>
+            <a:ext cx="12192000" cy="667816"/>
+          </a:xfrm>
+          <a:prstGeom prst="rect">
+            <a:avLst/>
+          </a:prstGeom>
+        </p:spPr>
+        <p:txBody>
+          <a:bodyPr vert="horz" lIns="91440" tIns="45720" rIns="91440" bIns="45720" rtlCol="0" anchor="ctr">
+            <a:normAutofit/>
+          </a:bodyPr>
+          <a:lstStyle>
+            <a:defPPr>
+              <a:defRPr lang="zh-TW"/>
+            </a:defPPr>
+            <a:lvl1pPr marL="342900" indent="-342900" algn="ctr">
+              <a:spcBef>
+                <a:spcPct val="20000"/>
+              </a:spcBef>
+              <a:buFont typeface="Arial" panose="02080604020202020204" pitchFamily="34" charset="0"/>
+              <a:buNone/>
+              <a:defRPr sz="6400" b="1">
+                <a:solidFill>
+                  <a:srgbClr val="660033"/>
+                </a:solidFill>
+                <a:latin typeface="微軟正黑體" pitchFamily="34" charset="-120"/>
+                <a:ea typeface="微軟正黑體" pitchFamily="34" charset="-120"/>
+              </a:defRPr>
+            </a:lvl1pPr>
+            <a:lvl2pPr marL="742950" indent="-285750">
+              <a:spcBef>
+                <a:spcPct val="20000"/>
+              </a:spcBef>
+              <a:buFont typeface="Arial" panose="02080604020202020204" pitchFamily="34" charset="0"/>
+              <a:buChar char="–"/>
+              <a:defRPr sz="2800"/>
+            </a:lvl2pPr>
+            <a:lvl3pPr marL="1143000" indent="-228600">
+              <a:spcBef>
+                <a:spcPct val="20000"/>
+              </a:spcBef>
+              <a:buFont typeface="Arial" panose="02080604020202020204" pitchFamily="34" charset="0"/>
+              <a:buChar char="•"/>
+              <a:defRPr sz="2400"/>
+            </a:lvl3pPr>
+            <a:lvl4pPr marL="1600200" indent="-228600">
+              <a:spcBef>
+                <a:spcPct val="20000"/>
+              </a:spcBef>
+              <a:buFont typeface="Arial" panose="02080604020202020204" pitchFamily="34" charset="0"/>
+              <a:buChar char="–"/>
+              <a:defRPr sz="2000"/>
+            </a:lvl4pPr>
+            <a:lvl5pPr marL="2057400" indent="-228600">
+              <a:spcBef>
+                <a:spcPct val="20000"/>
+              </a:spcBef>
+              <a:buFont typeface="Arial" panose="02080604020202020204" pitchFamily="34" charset="0"/>
+              <a:buChar char="»"/>
+              <a:defRPr sz="2000"/>
+            </a:lvl5pPr>
+            <a:lvl6pPr marL="2514600" indent="-228600">
+              <a:spcBef>
+                <a:spcPct val="20000"/>
+              </a:spcBef>
+              <a:buFont typeface="Arial" panose="02080604020202020204" pitchFamily="34" charset="0"/>
+              <a:buChar char="•"/>
+              <a:defRPr sz="2000"/>
+            </a:lvl6pPr>
+            <a:lvl7pPr marL="2971800" indent="-228600">
+              <a:spcBef>
+                <a:spcPct val="20000"/>
+              </a:spcBef>
+              <a:buFont typeface="Arial" panose="02080604020202020204" pitchFamily="34" charset="0"/>
+              <a:buChar char="•"/>
+              <a:defRPr sz="2000"/>
+            </a:lvl7pPr>
+            <a:lvl8pPr marL="3429000" indent="-228600">
+              <a:spcBef>
+                <a:spcPct val="20000"/>
+              </a:spcBef>
+              <a:buFont typeface="Arial" panose="02080604020202020204" pitchFamily="34" charset="0"/>
+              <a:buChar char="•"/>
+              <a:defRPr sz="2000"/>
+            </a:lvl8pPr>
+            <a:lvl9pPr marL="3886200" indent="-228600">
+              <a:spcBef>
+                <a:spcPct val="20000"/>
+              </a:spcBef>
+              <a:buFont typeface="Arial" panose="02080604020202020204" pitchFamily="34" charset="0"/>
+              <a:buChar char="•"/>
+              <a:defRPr sz="2000"/>
+            </a:lvl9pPr>
+          </a:lstStyle>
+          <a:p>
+            <a:r>
+              <a:rPr lang="en-US" sz="3600" dirty="0"/>
+              <a:t>( </a:t>
+            </a:r>
+            <a:r>
+              <a:rPr lang="zh-CN" altLang="en-US" sz="3600" dirty="0"/>
+              <a:t>正歌</a:t>
+            </a:r>
+            <a:r>
+              <a:rPr lang="en-US" sz="3600" dirty="0"/>
+              <a:t> )</a:t>
+            </a:r>
+            <a:endParaRPr lang="vi-VN" sz="3600" dirty="0"/>
           </a:p>
         </p:txBody>
       </p:sp>
@@ -3442,6 +3692,131 @@
           </a:p>
         </p:txBody>
       </p:sp>
+      <p:sp>
+        <p:nvSpPr>
+          <p:cNvPr id="2" name="TextBox 1">
+            <a:extLst>
+              <a:ext uri="{FF2B5EF4-FFF2-40B4-BE49-F238E27FC236}">
+                <a16:creationId xmlns:a16="http://schemas.microsoft.com/office/drawing/2014/main" id="{EAF7C036-3CD4-4846-EC5F-F0970D577ED7}"/>
+              </a:ext>
+            </a:extLst>
+          </p:cNvPr>
+          <p:cNvSpPr txBox="1"/>
+          <p:nvPr/>
+        </p:nvSpPr>
+        <p:spPr>
+          <a:xfrm>
+            <a:off x="0" y="5013176"/>
+            <a:ext cx="12192000" cy="667816"/>
+          </a:xfrm>
+          <a:prstGeom prst="rect">
+            <a:avLst/>
+          </a:prstGeom>
+        </p:spPr>
+        <p:txBody>
+          <a:bodyPr vert="horz" lIns="91440" tIns="45720" rIns="91440" bIns="45720" rtlCol="0" anchor="ctr">
+            <a:normAutofit/>
+          </a:bodyPr>
+          <a:lstStyle>
+            <a:defPPr>
+              <a:defRPr lang="zh-TW"/>
+            </a:defPPr>
+            <a:lvl1pPr marL="342900" indent="-342900" algn="ctr">
+              <a:spcBef>
+                <a:spcPct val="20000"/>
+              </a:spcBef>
+              <a:buFont typeface="Arial" panose="02080604020202020204" pitchFamily="34" charset="0"/>
+              <a:buNone/>
+              <a:defRPr sz="6400" b="1">
+                <a:solidFill>
+                  <a:srgbClr val="660033"/>
+                </a:solidFill>
+                <a:latin typeface="微軟正黑體" pitchFamily="34" charset="-120"/>
+                <a:ea typeface="微軟正黑體" pitchFamily="34" charset="-120"/>
+              </a:defRPr>
+            </a:lvl1pPr>
+            <a:lvl2pPr marL="742950" indent="-285750">
+              <a:spcBef>
+                <a:spcPct val="20000"/>
+              </a:spcBef>
+              <a:buFont typeface="Arial" panose="02080604020202020204" pitchFamily="34" charset="0"/>
+              <a:buChar char="–"/>
+              <a:defRPr sz="2800"/>
+            </a:lvl2pPr>
+            <a:lvl3pPr marL="1143000" indent="-228600">
+              <a:spcBef>
+                <a:spcPct val="20000"/>
+              </a:spcBef>
+              <a:buFont typeface="Arial" panose="02080604020202020204" pitchFamily="34" charset="0"/>
+              <a:buChar char="•"/>
+              <a:defRPr sz="2400"/>
+            </a:lvl3pPr>
+            <a:lvl4pPr marL="1600200" indent="-228600">
+              <a:spcBef>
+                <a:spcPct val="20000"/>
+              </a:spcBef>
+              <a:buFont typeface="Arial" panose="02080604020202020204" pitchFamily="34" charset="0"/>
+              <a:buChar char="–"/>
+              <a:defRPr sz="2000"/>
+            </a:lvl4pPr>
+            <a:lvl5pPr marL="2057400" indent="-228600">
+              <a:spcBef>
+                <a:spcPct val="20000"/>
+              </a:spcBef>
+              <a:buFont typeface="Arial" panose="02080604020202020204" pitchFamily="34" charset="0"/>
+              <a:buChar char="»"/>
+              <a:defRPr sz="2000"/>
+            </a:lvl5pPr>
+            <a:lvl6pPr marL="2514600" indent="-228600">
+              <a:spcBef>
+                <a:spcPct val="20000"/>
+              </a:spcBef>
+              <a:buFont typeface="Arial" panose="02080604020202020204" pitchFamily="34" charset="0"/>
+              <a:buChar char="•"/>
+              <a:defRPr sz="2000"/>
+            </a:lvl6pPr>
+            <a:lvl7pPr marL="2971800" indent="-228600">
+              <a:spcBef>
+                <a:spcPct val="20000"/>
+              </a:spcBef>
+              <a:buFont typeface="Arial" panose="02080604020202020204" pitchFamily="34" charset="0"/>
+              <a:buChar char="•"/>
+              <a:defRPr sz="2000"/>
+            </a:lvl7pPr>
+            <a:lvl8pPr marL="3429000" indent="-228600">
+              <a:spcBef>
+                <a:spcPct val="20000"/>
+              </a:spcBef>
+              <a:buFont typeface="Arial" panose="02080604020202020204" pitchFamily="34" charset="0"/>
+              <a:buChar char="•"/>
+              <a:defRPr sz="2000"/>
+            </a:lvl8pPr>
+            <a:lvl9pPr marL="3886200" indent="-228600">
+              <a:spcBef>
+                <a:spcPct val="20000"/>
+              </a:spcBef>
+              <a:buFont typeface="Arial" panose="02080604020202020204" pitchFamily="34" charset="0"/>
+              <a:buChar char="•"/>
+              <a:defRPr sz="2000"/>
+            </a:lvl9pPr>
+          </a:lstStyle>
+          <a:p>
+            <a:r>
+              <a:rPr lang="en-US" sz="3600" dirty="0"/>
+              <a:t>( </a:t>
+            </a:r>
+            <a:r>
+              <a:rPr lang="zh-CN" altLang="en-US" sz="3600" dirty="0"/>
+              <a:t>正歌</a:t>
+            </a:r>
+            <a:r>
+              <a:rPr lang="en-US" sz="3600" dirty="0"/>
+              <a:t> )</a:t>
+            </a:r>
+            <a:endParaRPr lang="vi-VN" sz="3600" dirty="0"/>
+          </a:p>
+        </p:txBody>
+      </p:sp>
     </p:spTree>
     <p:extLst>
       <p:ext uri="{BB962C8B-B14F-4D97-AF65-F5344CB8AC3E}">
@@ -3542,6 +3917,131 @@
           </a:p>
         </p:txBody>
       </p:sp>
+      <p:sp>
+        <p:nvSpPr>
+          <p:cNvPr id="2" name="TextBox 1">
+            <a:extLst>
+              <a:ext uri="{FF2B5EF4-FFF2-40B4-BE49-F238E27FC236}">
+                <a16:creationId xmlns:a16="http://schemas.microsoft.com/office/drawing/2014/main" id="{05CDF484-DE04-3270-9C46-DDE161DDF058}"/>
+              </a:ext>
+            </a:extLst>
+          </p:cNvPr>
+          <p:cNvSpPr txBox="1"/>
+          <p:nvPr/>
+        </p:nvSpPr>
+        <p:spPr>
+          <a:xfrm>
+            <a:off x="0" y="5013176"/>
+            <a:ext cx="12192000" cy="667816"/>
+          </a:xfrm>
+          <a:prstGeom prst="rect">
+            <a:avLst/>
+          </a:prstGeom>
+        </p:spPr>
+        <p:txBody>
+          <a:bodyPr vert="horz" lIns="91440" tIns="45720" rIns="91440" bIns="45720" rtlCol="0" anchor="ctr">
+            <a:normAutofit/>
+          </a:bodyPr>
+          <a:lstStyle>
+            <a:defPPr>
+              <a:defRPr lang="zh-TW"/>
+            </a:defPPr>
+            <a:lvl1pPr marL="342900" indent="-342900" algn="ctr">
+              <a:spcBef>
+                <a:spcPct val="20000"/>
+              </a:spcBef>
+              <a:buFont typeface="Arial" panose="02080604020202020204" pitchFamily="34" charset="0"/>
+              <a:buNone/>
+              <a:defRPr sz="6400" b="1">
+                <a:solidFill>
+                  <a:srgbClr val="660033"/>
+                </a:solidFill>
+                <a:latin typeface="微軟正黑體" pitchFamily="34" charset="-120"/>
+                <a:ea typeface="微軟正黑體" pitchFamily="34" charset="-120"/>
+              </a:defRPr>
+            </a:lvl1pPr>
+            <a:lvl2pPr marL="742950" indent="-285750">
+              <a:spcBef>
+                <a:spcPct val="20000"/>
+              </a:spcBef>
+              <a:buFont typeface="Arial" panose="02080604020202020204" pitchFamily="34" charset="0"/>
+              <a:buChar char="–"/>
+              <a:defRPr sz="2800"/>
+            </a:lvl2pPr>
+            <a:lvl3pPr marL="1143000" indent="-228600">
+              <a:spcBef>
+                <a:spcPct val="20000"/>
+              </a:spcBef>
+              <a:buFont typeface="Arial" panose="02080604020202020204" pitchFamily="34" charset="0"/>
+              <a:buChar char="•"/>
+              <a:defRPr sz="2400"/>
+            </a:lvl3pPr>
+            <a:lvl4pPr marL="1600200" indent="-228600">
+              <a:spcBef>
+                <a:spcPct val="20000"/>
+              </a:spcBef>
+              <a:buFont typeface="Arial" panose="02080604020202020204" pitchFamily="34" charset="0"/>
+              <a:buChar char="–"/>
+              <a:defRPr sz="2000"/>
+            </a:lvl4pPr>
+            <a:lvl5pPr marL="2057400" indent="-228600">
+              <a:spcBef>
+                <a:spcPct val="20000"/>
+              </a:spcBef>
+              <a:buFont typeface="Arial" panose="02080604020202020204" pitchFamily="34" charset="0"/>
+              <a:buChar char="»"/>
+              <a:defRPr sz="2000"/>
+            </a:lvl5pPr>
+            <a:lvl6pPr marL="2514600" indent="-228600">
+              <a:spcBef>
+                <a:spcPct val="20000"/>
+              </a:spcBef>
+              <a:buFont typeface="Arial" panose="02080604020202020204" pitchFamily="34" charset="0"/>
+              <a:buChar char="•"/>
+              <a:defRPr sz="2000"/>
+            </a:lvl6pPr>
+            <a:lvl7pPr marL="2971800" indent="-228600">
+              <a:spcBef>
+                <a:spcPct val="20000"/>
+              </a:spcBef>
+              <a:buFont typeface="Arial" panose="02080604020202020204" pitchFamily="34" charset="0"/>
+              <a:buChar char="•"/>
+              <a:defRPr sz="2000"/>
+            </a:lvl7pPr>
+            <a:lvl8pPr marL="3429000" indent="-228600">
+              <a:spcBef>
+                <a:spcPct val="20000"/>
+              </a:spcBef>
+              <a:buFont typeface="Arial" panose="02080604020202020204" pitchFamily="34" charset="0"/>
+              <a:buChar char="•"/>
+              <a:defRPr sz="2000"/>
+            </a:lvl8pPr>
+            <a:lvl9pPr marL="3886200" indent="-228600">
+              <a:spcBef>
+                <a:spcPct val="20000"/>
+              </a:spcBef>
+              <a:buFont typeface="Arial" panose="02080604020202020204" pitchFamily="34" charset="0"/>
+              <a:buChar char="•"/>
+              <a:defRPr sz="2000"/>
+            </a:lvl9pPr>
+          </a:lstStyle>
+          <a:p>
+            <a:r>
+              <a:rPr lang="en-US" sz="3600" dirty="0"/>
+              <a:t>( </a:t>
+            </a:r>
+            <a:r>
+              <a:rPr lang="zh-CN" altLang="en-US" sz="3600" dirty="0"/>
+              <a:t>正歌</a:t>
+            </a:r>
+            <a:r>
+              <a:rPr lang="en-US" sz="3600" dirty="0"/>
+              <a:t> )</a:t>
+            </a:r>
+            <a:endParaRPr lang="vi-VN" sz="3600" dirty="0"/>
+          </a:p>
+        </p:txBody>
+      </p:sp>
     </p:spTree>
     <p:extLst>
       <p:ext uri="{BB962C8B-B14F-4D97-AF65-F5344CB8AC3E}">
@@ -3669,6 +4169,131 @@
           </a:p>
         </p:txBody>
       </p:sp>
+      <p:sp>
+        <p:nvSpPr>
+          <p:cNvPr id="2" name="TextBox 1">
+            <a:extLst>
+              <a:ext uri="{FF2B5EF4-FFF2-40B4-BE49-F238E27FC236}">
+                <a16:creationId xmlns:a16="http://schemas.microsoft.com/office/drawing/2014/main" id="{31F7EE7A-4B7D-7BD4-EE8E-A790B711F075}"/>
+              </a:ext>
+            </a:extLst>
+          </p:cNvPr>
+          <p:cNvSpPr txBox="1"/>
+          <p:nvPr/>
+        </p:nvSpPr>
+        <p:spPr>
+          <a:xfrm>
+            <a:off x="0" y="5013176"/>
+            <a:ext cx="12192000" cy="667816"/>
+          </a:xfrm>
+          <a:prstGeom prst="rect">
+            <a:avLst/>
+          </a:prstGeom>
+        </p:spPr>
+        <p:txBody>
+          <a:bodyPr vert="horz" lIns="91440" tIns="45720" rIns="91440" bIns="45720" rtlCol="0" anchor="ctr">
+            <a:normAutofit/>
+          </a:bodyPr>
+          <a:lstStyle>
+            <a:defPPr>
+              <a:defRPr lang="zh-TW"/>
+            </a:defPPr>
+            <a:lvl1pPr marL="342900" indent="-342900" algn="ctr">
+              <a:spcBef>
+                <a:spcPct val="20000"/>
+              </a:spcBef>
+              <a:buFont typeface="Arial" panose="02080604020202020204" pitchFamily="34" charset="0"/>
+              <a:buNone/>
+              <a:defRPr sz="6400" b="1">
+                <a:solidFill>
+                  <a:srgbClr val="660033"/>
+                </a:solidFill>
+                <a:latin typeface="微軟正黑體" pitchFamily="34" charset="-120"/>
+                <a:ea typeface="微軟正黑體" pitchFamily="34" charset="-120"/>
+              </a:defRPr>
+            </a:lvl1pPr>
+            <a:lvl2pPr marL="742950" indent="-285750">
+              <a:spcBef>
+                <a:spcPct val="20000"/>
+              </a:spcBef>
+              <a:buFont typeface="Arial" panose="02080604020202020204" pitchFamily="34" charset="0"/>
+              <a:buChar char="–"/>
+              <a:defRPr sz="2800"/>
+            </a:lvl2pPr>
+            <a:lvl3pPr marL="1143000" indent="-228600">
+              <a:spcBef>
+                <a:spcPct val="20000"/>
+              </a:spcBef>
+              <a:buFont typeface="Arial" panose="02080604020202020204" pitchFamily="34" charset="0"/>
+              <a:buChar char="•"/>
+              <a:defRPr sz="2400"/>
+            </a:lvl3pPr>
+            <a:lvl4pPr marL="1600200" indent="-228600">
+              <a:spcBef>
+                <a:spcPct val="20000"/>
+              </a:spcBef>
+              <a:buFont typeface="Arial" panose="02080604020202020204" pitchFamily="34" charset="0"/>
+              <a:buChar char="–"/>
+              <a:defRPr sz="2000"/>
+            </a:lvl4pPr>
+            <a:lvl5pPr marL="2057400" indent="-228600">
+              <a:spcBef>
+                <a:spcPct val="20000"/>
+              </a:spcBef>
+              <a:buFont typeface="Arial" panose="02080604020202020204" pitchFamily="34" charset="0"/>
+              <a:buChar char="»"/>
+              <a:defRPr sz="2000"/>
+            </a:lvl5pPr>
+            <a:lvl6pPr marL="2514600" indent="-228600">
+              <a:spcBef>
+                <a:spcPct val="20000"/>
+              </a:spcBef>
+              <a:buFont typeface="Arial" panose="02080604020202020204" pitchFamily="34" charset="0"/>
+              <a:buChar char="•"/>
+              <a:defRPr sz="2000"/>
+            </a:lvl6pPr>
+            <a:lvl7pPr marL="2971800" indent="-228600">
+              <a:spcBef>
+                <a:spcPct val="20000"/>
+              </a:spcBef>
+              <a:buFont typeface="Arial" panose="02080604020202020204" pitchFamily="34" charset="0"/>
+              <a:buChar char="•"/>
+              <a:defRPr sz="2000"/>
+            </a:lvl7pPr>
+            <a:lvl8pPr marL="3429000" indent="-228600">
+              <a:spcBef>
+                <a:spcPct val="20000"/>
+              </a:spcBef>
+              <a:buFont typeface="Arial" panose="02080604020202020204" pitchFamily="34" charset="0"/>
+              <a:buChar char="•"/>
+              <a:defRPr sz="2000"/>
+            </a:lvl8pPr>
+            <a:lvl9pPr marL="3886200" indent="-228600">
+              <a:spcBef>
+                <a:spcPct val="20000"/>
+              </a:spcBef>
+              <a:buFont typeface="Arial" panose="02080604020202020204" pitchFamily="34" charset="0"/>
+              <a:buChar char="•"/>
+              <a:defRPr sz="2000"/>
+            </a:lvl9pPr>
+          </a:lstStyle>
+          <a:p>
+            <a:r>
+              <a:rPr lang="en-US" sz="3600" dirty="0"/>
+              <a:t>( </a:t>
+            </a:r>
+            <a:r>
+              <a:rPr lang="zh-CN" altLang="en-US" sz="3600" dirty="0"/>
+              <a:t>副歌</a:t>
+            </a:r>
+            <a:r>
+              <a:rPr lang="en-US" sz="3600" dirty="0"/>
+              <a:t> )</a:t>
+            </a:r>
+            <a:endParaRPr lang="vi-VN" sz="3600" dirty="0"/>
+          </a:p>
+        </p:txBody>
+      </p:sp>
     </p:spTree>
     <p:extLst>
       <p:ext uri="{BB962C8B-B14F-4D97-AF65-F5344CB8AC3E}">
@@ -3759,6 +4384,131 @@
           </a:p>
         </p:txBody>
       </p:sp>
+      <p:sp>
+        <p:nvSpPr>
+          <p:cNvPr id="2" name="TextBox 1">
+            <a:extLst>
+              <a:ext uri="{FF2B5EF4-FFF2-40B4-BE49-F238E27FC236}">
+                <a16:creationId xmlns:a16="http://schemas.microsoft.com/office/drawing/2014/main" id="{C9682839-8AC5-1B52-D24C-C68748F75AEE}"/>
+              </a:ext>
+            </a:extLst>
+          </p:cNvPr>
+          <p:cNvSpPr txBox="1"/>
+          <p:nvPr/>
+        </p:nvSpPr>
+        <p:spPr>
+          <a:xfrm>
+            <a:off x="0" y="5013176"/>
+            <a:ext cx="12192000" cy="667816"/>
+          </a:xfrm>
+          <a:prstGeom prst="rect">
+            <a:avLst/>
+          </a:prstGeom>
+        </p:spPr>
+        <p:txBody>
+          <a:bodyPr vert="horz" lIns="91440" tIns="45720" rIns="91440" bIns="45720" rtlCol="0" anchor="ctr">
+            <a:normAutofit/>
+          </a:bodyPr>
+          <a:lstStyle>
+            <a:defPPr>
+              <a:defRPr lang="zh-TW"/>
+            </a:defPPr>
+            <a:lvl1pPr marL="342900" indent="-342900" algn="ctr">
+              <a:spcBef>
+                <a:spcPct val="20000"/>
+              </a:spcBef>
+              <a:buFont typeface="Arial" panose="02080604020202020204" pitchFamily="34" charset="0"/>
+              <a:buNone/>
+              <a:defRPr sz="6400" b="1">
+                <a:solidFill>
+                  <a:srgbClr val="660033"/>
+                </a:solidFill>
+                <a:latin typeface="微軟正黑體" pitchFamily="34" charset="-120"/>
+                <a:ea typeface="微軟正黑體" pitchFamily="34" charset="-120"/>
+              </a:defRPr>
+            </a:lvl1pPr>
+            <a:lvl2pPr marL="742950" indent="-285750">
+              <a:spcBef>
+                <a:spcPct val="20000"/>
+              </a:spcBef>
+              <a:buFont typeface="Arial" panose="02080604020202020204" pitchFamily="34" charset="0"/>
+              <a:buChar char="–"/>
+              <a:defRPr sz="2800"/>
+            </a:lvl2pPr>
+            <a:lvl3pPr marL="1143000" indent="-228600">
+              <a:spcBef>
+                <a:spcPct val="20000"/>
+              </a:spcBef>
+              <a:buFont typeface="Arial" panose="02080604020202020204" pitchFamily="34" charset="0"/>
+              <a:buChar char="•"/>
+              <a:defRPr sz="2400"/>
+            </a:lvl3pPr>
+            <a:lvl4pPr marL="1600200" indent="-228600">
+              <a:spcBef>
+                <a:spcPct val="20000"/>
+              </a:spcBef>
+              <a:buFont typeface="Arial" panose="02080604020202020204" pitchFamily="34" charset="0"/>
+              <a:buChar char="–"/>
+              <a:defRPr sz="2000"/>
+            </a:lvl4pPr>
+            <a:lvl5pPr marL="2057400" indent="-228600">
+              <a:spcBef>
+                <a:spcPct val="20000"/>
+              </a:spcBef>
+              <a:buFont typeface="Arial" panose="02080604020202020204" pitchFamily="34" charset="0"/>
+              <a:buChar char="»"/>
+              <a:defRPr sz="2000"/>
+            </a:lvl5pPr>
+            <a:lvl6pPr marL="2514600" indent="-228600">
+              <a:spcBef>
+                <a:spcPct val="20000"/>
+              </a:spcBef>
+              <a:buFont typeface="Arial" panose="02080604020202020204" pitchFamily="34" charset="0"/>
+              <a:buChar char="•"/>
+              <a:defRPr sz="2000"/>
+            </a:lvl6pPr>
+            <a:lvl7pPr marL="2971800" indent="-228600">
+              <a:spcBef>
+                <a:spcPct val="20000"/>
+              </a:spcBef>
+              <a:buFont typeface="Arial" panose="02080604020202020204" pitchFamily="34" charset="0"/>
+              <a:buChar char="•"/>
+              <a:defRPr sz="2000"/>
+            </a:lvl7pPr>
+            <a:lvl8pPr marL="3429000" indent="-228600">
+              <a:spcBef>
+                <a:spcPct val="20000"/>
+              </a:spcBef>
+              <a:buFont typeface="Arial" panose="02080604020202020204" pitchFamily="34" charset="0"/>
+              <a:buChar char="•"/>
+              <a:defRPr sz="2000"/>
+            </a:lvl8pPr>
+            <a:lvl9pPr marL="3886200" indent="-228600">
+              <a:spcBef>
+                <a:spcPct val="20000"/>
+              </a:spcBef>
+              <a:buFont typeface="Arial" panose="02080604020202020204" pitchFamily="34" charset="0"/>
+              <a:buChar char="•"/>
+              <a:defRPr sz="2000"/>
+            </a:lvl9pPr>
+          </a:lstStyle>
+          <a:p>
+            <a:r>
+              <a:rPr lang="en-US" sz="3600" dirty="0"/>
+              <a:t>( </a:t>
+            </a:r>
+            <a:r>
+              <a:rPr lang="zh-CN" altLang="en-US" sz="3600" dirty="0"/>
+              <a:t>副歌</a:t>
+            </a:r>
+            <a:r>
+              <a:rPr lang="en-US" sz="3600" dirty="0"/>
+              <a:t> )</a:t>
+            </a:r>
+            <a:endParaRPr lang="vi-VN" sz="3600" dirty="0"/>
+          </a:p>
+        </p:txBody>
+      </p:sp>
     </p:spTree>
     <p:extLst>
       <p:ext uri="{BB962C8B-B14F-4D97-AF65-F5344CB8AC3E}">
@@ -3856,6 +4606,131 @@
           </a:p>
         </p:txBody>
       </p:sp>
+      <p:sp>
+        <p:nvSpPr>
+          <p:cNvPr id="2" name="TextBox 1">
+            <a:extLst>
+              <a:ext uri="{FF2B5EF4-FFF2-40B4-BE49-F238E27FC236}">
+                <a16:creationId xmlns:a16="http://schemas.microsoft.com/office/drawing/2014/main" id="{DD0390EA-BB33-091A-C394-7F1B9210FA9B}"/>
+              </a:ext>
+            </a:extLst>
+          </p:cNvPr>
+          <p:cNvSpPr txBox="1"/>
+          <p:nvPr/>
+        </p:nvSpPr>
+        <p:spPr>
+          <a:xfrm>
+            <a:off x="0" y="5013176"/>
+            <a:ext cx="12192000" cy="667816"/>
+          </a:xfrm>
+          <a:prstGeom prst="rect">
+            <a:avLst/>
+          </a:prstGeom>
+        </p:spPr>
+        <p:txBody>
+          <a:bodyPr vert="horz" lIns="91440" tIns="45720" rIns="91440" bIns="45720" rtlCol="0" anchor="ctr">
+            <a:normAutofit/>
+          </a:bodyPr>
+          <a:lstStyle>
+            <a:defPPr>
+              <a:defRPr lang="zh-TW"/>
+            </a:defPPr>
+            <a:lvl1pPr marL="342900" indent="-342900" algn="ctr">
+              <a:spcBef>
+                <a:spcPct val="20000"/>
+              </a:spcBef>
+              <a:buFont typeface="Arial" panose="02080604020202020204" pitchFamily="34" charset="0"/>
+              <a:buNone/>
+              <a:defRPr sz="6400" b="1">
+                <a:solidFill>
+                  <a:srgbClr val="660033"/>
+                </a:solidFill>
+                <a:latin typeface="微軟正黑體" pitchFamily="34" charset="-120"/>
+                <a:ea typeface="微軟正黑體" pitchFamily="34" charset="-120"/>
+              </a:defRPr>
+            </a:lvl1pPr>
+            <a:lvl2pPr marL="742950" indent="-285750">
+              <a:spcBef>
+                <a:spcPct val="20000"/>
+              </a:spcBef>
+              <a:buFont typeface="Arial" panose="02080604020202020204" pitchFamily="34" charset="0"/>
+              <a:buChar char="–"/>
+              <a:defRPr sz="2800"/>
+            </a:lvl2pPr>
+            <a:lvl3pPr marL="1143000" indent="-228600">
+              <a:spcBef>
+                <a:spcPct val="20000"/>
+              </a:spcBef>
+              <a:buFont typeface="Arial" panose="02080604020202020204" pitchFamily="34" charset="0"/>
+              <a:buChar char="•"/>
+              <a:defRPr sz="2400"/>
+            </a:lvl3pPr>
+            <a:lvl4pPr marL="1600200" indent="-228600">
+              <a:spcBef>
+                <a:spcPct val="20000"/>
+              </a:spcBef>
+              <a:buFont typeface="Arial" panose="02080604020202020204" pitchFamily="34" charset="0"/>
+              <a:buChar char="–"/>
+              <a:defRPr sz="2000"/>
+            </a:lvl4pPr>
+            <a:lvl5pPr marL="2057400" indent="-228600">
+              <a:spcBef>
+                <a:spcPct val="20000"/>
+              </a:spcBef>
+              <a:buFont typeface="Arial" panose="02080604020202020204" pitchFamily="34" charset="0"/>
+              <a:buChar char="»"/>
+              <a:defRPr sz="2000"/>
+            </a:lvl5pPr>
+            <a:lvl6pPr marL="2514600" indent="-228600">
+              <a:spcBef>
+                <a:spcPct val="20000"/>
+              </a:spcBef>
+              <a:buFont typeface="Arial" panose="02080604020202020204" pitchFamily="34" charset="0"/>
+              <a:buChar char="•"/>
+              <a:defRPr sz="2000"/>
+            </a:lvl6pPr>
+            <a:lvl7pPr marL="2971800" indent="-228600">
+              <a:spcBef>
+                <a:spcPct val="20000"/>
+              </a:spcBef>
+              <a:buFont typeface="Arial" panose="02080604020202020204" pitchFamily="34" charset="0"/>
+              <a:buChar char="•"/>
+              <a:defRPr sz="2000"/>
+            </a:lvl7pPr>
+            <a:lvl8pPr marL="3429000" indent="-228600">
+              <a:spcBef>
+                <a:spcPct val="20000"/>
+              </a:spcBef>
+              <a:buFont typeface="Arial" panose="02080604020202020204" pitchFamily="34" charset="0"/>
+              <a:buChar char="•"/>
+              <a:defRPr sz="2000"/>
+            </a:lvl8pPr>
+            <a:lvl9pPr marL="3886200" indent="-228600">
+              <a:spcBef>
+                <a:spcPct val="20000"/>
+              </a:spcBef>
+              <a:buFont typeface="Arial" panose="02080604020202020204" pitchFamily="34" charset="0"/>
+              <a:buChar char="•"/>
+              <a:defRPr sz="2000"/>
+            </a:lvl9pPr>
+          </a:lstStyle>
+          <a:p>
+            <a:r>
+              <a:rPr lang="en-US" sz="3600" dirty="0"/>
+              <a:t>( </a:t>
+            </a:r>
+            <a:r>
+              <a:rPr lang="zh-CN" altLang="en-US" sz="3600" dirty="0"/>
+              <a:t>副歌</a:t>
+            </a:r>
+            <a:r>
+              <a:rPr lang="en-US" sz="3600" dirty="0"/>
+              <a:t> )</a:t>
+            </a:r>
+            <a:endParaRPr lang="vi-VN" sz="3600" dirty="0"/>
+          </a:p>
+        </p:txBody>
+      </p:sp>
     </p:spTree>
     <p:extLst>
       <p:ext uri="{BB962C8B-B14F-4D97-AF65-F5344CB8AC3E}">
@@ -3943,6 +4818,131 @@
               </a:rPr>
               <a:t>我藏身主蔭下昂然步過</a:t>
             </a:r>
+          </a:p>
+        </p:txBody>
+      </p:sp>
+      <p:sp>
+        <p:nvSpPr>
+          <p:cNvPr id="2" name="TextBox 1">
+            <a:extLst>
+              <a:ext uri="{FF2B5EF4-FFF2-40B4-BE49-F238E27FC236}">
+                <a16:creationId xmlns:a16="http://schemas.microsoft.com/office/drawing/2014/main" id="{81094E00-03BE-6729-43CB-C92964AA4153}"/>
+              </a:ext>
+            </a:extLst>
+          </p:cNvPr>
+          <p:cNvSpPr txBox="1"/>
+          <p:nvPr/>
+        </p:nvSpPr>
+        <p:spPr>
+          <a:xfrm>
+            <a:off x="0" y="5013176"/>
+            <a:ext cx="12192000" cy="667816"/>
+          </a:xfrm>
+          <a:prstGeom prst="rect">
+            <a:avLst/>
+          </a:prstGeom>
+        </p:spPr>
+        <p:txBody>
+          <a:bodyPr vert="horz" lIns="91440" tIns="45720" rIns="91440" bIns="45720" rtlCol="0" anchor="ctr">
+            <a:normAutofit/>
+          </a:bodyPr>
+          <a:lstStyle>
+            <a:defPPr>
+              <a:defRPr lang="zh-TW"/>
+            </a:defPPr>
+            <a:lvl1pPr marL="342900" indent="-342900" algn="ctr">
+              <a:spcBef>
+                <a:spcPct val="20000"/>
+              </a:spcBef>
+              <a:buFont typeface="Arial" panose="02080604020202020204" pitchFamily="34" charset="0"/>
+              <a:buNone/>
+              <a:defRPr sz="6400" b="1">
+                <a:solidFill>
+                  <a:srgbClr val="660033"/>
+                </a:solidFill>
+                <a:latin typeface="微軟正黑體" pitchFamily="34" charset="-120"/>
+                <a:ea typeface="微軟正黑體" pitchFamily="34" charset="-120"/>
+              </a:defRPr>
+            </a:lvl1pPr>
+            <a:lvl2pPr marL="742950" indent="-285750">
+              <a:spcBef>
+                <a:spcPct val="20000"/>
+              </a:spcBef>
+              <a:buFont typeface="Arial" panose="02080604020202020204" pitchFamily="34" charset="0"/>
+              <a:buChar char="–"/>
+              <a:defRPr sz="2800"/>
+            </a:lvl2pPr>
+            <a:lvl3pPr marL="1143000" indent="-228600">
+              <a:spcBef>
+                <a:spcPct val="20000"/>
+              </a:spcBef>
+              <a:buFont typeface="Arial" panose="02080604020202020204" pitchFamily="34" charset="0"/>
+              <a:buChar char="•"/>
+              <a:defRPr sz="2400"/>
+            </a:lvl3pPr>
+            <a:lvl4pPr marL="1600200" indent="-228600">
+              <a:spcBef>
+                <a:spcPct val="20000"/>
+              </a:spcBef>
+              <a:buFont typeface="Arial" panose="02080604020202020204" pitchFamily="34" charset="0"/>
+              <a:buChar char="–"/>
+              <a:defRPr sz="2000"/>
+            </a:lvl4pPr>
+            <a:lvl5pPr marL="2057400" indent="-228600">
+              <a:spcBef>
+                <a:spcPct val="20000"/>
+              </a:spcBef>
+              <a:buFont typeface="Arial" panose="02080604020202020204" pitchFamily="34" charset="0"/>
+              <a:buChar char="»"/>
+              <a:defRPr sz="2000"/>
+            </a:lvl5pPr>
+            <a:lvl6pPr marL="2514600" indent="-228600">
+              <a:spcBef>
+                <a:spcPct val="20000"/>
+              </a:spcBef>
+              <a:buFont typeface="Arial" panose="02080604020202020204" pitchFamily="34" charset="0"/>
+              <a:buChar char="•"/>
+              <a:defRPr sz="2000"/>
+            </a:lvl6pPr>
+            <a:lvl7pPr marL="2971800" indent="-228600">
+              <a:spcBef>
+                <a:spcPct val="20000"/>
+              </a:spcBef>
+              <a:buFont typeface="Arial" panose="02080604020202020204" pitchFamily="34" charset="0"/>
+              <a:buChar char="•"/>
+              <a:defRPr sz="2000"/>
+            </a:lvl7pPr>
+            <a:lvl8pPr marL="3429000" indent="-228600">
+              <a:spcBef>
+                <a:spcPct val="20000"/>
+              </a:spcBef>
+              <a:buFont typeface="Arial" panose="02080604020202020204" pitchFamily="34" charset="0"/>
+              <a:buChar char="•"/>
+              <a:defRPr sz="2000"/>
+            </a:lvl8pPr>
+            <a:lvl9pPr marL="3886200" indent="-228600">
+              <a:spcBef>
+                <a:spcPct val="20000"/>
+              </a:spcBef>
+              <a:buFont typeface="Arial" panose="02080604020202020204" pitchFamily="34" charset="0"/>
+              <a:buChar char="•"/>
+              <a:defRPr sz="2000"/>
+            </a:lvl9pPr>
+          </a:lstStyle>
+          <a:p>
+            <a:r>
+              <a:rPr lang="en-US" sz="3600" dirty="0"/>
+              <a:t>( </a:t>
+            </a:r>
+            <a:r>
+              <a:rPr lang="zh-CN" altLang="en-US" sz="3600" dirty="0"/>
+              <a:t>副歌</a:t>
+            </a:r>
+            <a:r>
+              <a:rPr lang="en-US" sz="3600" dirty="0"/>
+              <a:t> )</a:t>
+            </a:r>
+            <a:endParaRPr lang="vi-VN" sz="3600" dirty="0"/>
           </a:p>
         </p:txBody>
       </p:sp>
